--- a/RA5 - Legislacio i normativa/AA3 - Propietat intellectual i llicencies/RA5_AA3_Propietat_intellectual.pptx
+++ b/RA5 - Legislacio i normativa/AA3 - Propietat intellectual i llicencies/RA5_AA3_Propietat_intellectual.pptx
@@ -2140,6 +2140,10 @@
           </a:solidFill>
           <a:ln/>
         </p:spPr>
+        <p:txBody>
+          <a:bodyPr/>
+          <a:p/>
+        </p:txBody>
       </p:sp>
       <p:sp>
         <p:nvSpPr>
@@ -2160,6 +2164,10 @@
           </a:solidFill>
           <a:ln/>
         </p:spPr>
+        <p:txBody>
+          <a:bodyPr/>
+          <a:p/>
+        </p:txBody>
       </p:sp>
       <p:sp>
         <p:nvSpPr>
@@ -2643,6 +2651,10 @@
           </a:solidFill>
           <a:ln/>
         </p:spPr>
+        <p:txBody>
+          <a:bodyPr/>
+          <a:p/>
+        </p:txBody>
       </p:sp>
       <p:pic>
         <p:nvPicPr>
@@ -3149,6 +3161,10 @@
             </a:outerShdw>
           </a:effectLst>
         </p:spPr>
+        <p:txBody>
+          <a:bodyPr/>
+          <a:p/>
+        </p:txBody>
       </p:sp>
       <p:sp>
         <p:nvSpPr>
@@ -3169,6 +3185,10 @@
           </a:solidFill>
           <a:ln/>
         </p:spPr>
+        <p:txBody>
+          <a:bodyPr/>
+          <a:p/>
+        </p:txBody>
       </p:sp>
       <p:pic>
         <p:nvPicPr>
@@ -3308,6 +3328,10 @@
             </a:outerShdw>
           </a:effectLst>
         </p:spPr>
+        <p:txBody>
+          <a:bodyPr/>
+          <a:p/>
+        </p:txBody>
       </p:sp>
       <p:sp>
         <p:nvSpPr>
@@ -3328,6 +3352,10 @@
           </a:solidFill>
           <a:ln/>
         </p:spPr>
+        <p:txBody>
+          <a:bodyPr/>
+          <a:p/>
+        </p:txBody>
       </p:sp>
       <p:pic>
         <p:nvPicPr>
@@ -3467,6 +3495,10 @@
             </a:outerShdw>
           </a:effectLst>
         </p:spPr>
+        <p:txBody>
+          <a:bodyPr/>
+          <a:p/>
+        </p:txBody>
       </p:sp>
       <p:sp>
         <p:nvSpPr>
@@ -3487,6 +3519,10 @@
           </a:solidFill>
           <a:ln/>
         </p:spPr>
+        <p:txBody>
+          <a:bodyPr/>
+          <a:p/>
+        </p:txBody>
       </p:sp>
       <p:pic>
         <p:nvPicPr>
@@ -3775,6 +3811,10 @@
             </a:outerShdw>
           </a:effectLst>
         </p:spPr>
+        <p:txBody>
+          <a:bodyPr/>
+          <a:p/>
+        </p:txBody>
       </p:sp>
       <p:sp>
         <p:nvSpPr>
@@ -3795,6 +3835,10 @@
           </a:solidFill>
           <a:ln/>
         </p:spPr>
+        <p:txBody>
+          <a:bodyPr/>
+          <a:p/>
+        </p:txBody>
       </p:sp>
       <p:pic>
         <p:nvPicPr>
@@ -3934,6 +3978,10 @@
             </a:outerShdw>
           </a:effectLst>
         </p:spPr>
+        <p:txBody>
+          <a:bodyPr/>
+          <a:p/>
+        </p:txBody>
       </p:sp>
       <p:sp>
         <p:nvSpPr>
@@ -3954,6 +4002,10 @@
           </a:solidFill>
           <a:ln/>
         </p:spPr>
+        <p:txBody>
+          <a:bodyPr/>
+          <a:p/>
+        </p:txBody>
       </p:sp>
       <p:pic>
         <p:nvPicPr>
@@ -4093,6 +4145,10 @@
             </a:outerShdw>
           </a:effectLst>
         </p:spPr>
+        <p:txBody>
+          <a:bodyPr/>
+          <a:p/>
+        </p:txBody>
       </p:sp>
       <p:sp>
         <p:nvSpPr>
@@ -4113,6 +4169,10 @@
           </a:solidFill>
           <a:ln/>
         </p:spPr>
+        <p:txBody>
+          <a:bodyPr/>
+          <a:p/>
+        </p:txBody>
       </p:sp>
       <p:pic>
         <p:nvPicPr>
@@ -5036,7 +5096,7 @@
                 <a:ea typeface="Calibri" pitchFamily="34" charset="-122"/>
                 <a:cs typeface="Calibri" pitchFamily="34" charset="-120"/>
               </a:rPr>
-              <a:t>Llicència Creative Commons BY-NC-SA · Institut Obert de Catalunya, 2011 (materials adaptats i ampliats)</a:t>
+              <a:t>Llicència CC BY-SA 4.0 · Adaptat de "Materials" (SMX-0226SI), Carlos Alonso Martínez, Escola Pia de Mataró</a:t>
             </a:r>
             <a:endParaRPr lang="en-US" sz="1050" dirty="0"/>
           </a:p>
@@ -5263,6 +5323,10 @@
             </a:outerShdw>
           </a:effectLst>
         </p:spPr>
+        <p:txBody>
+          <a:bodyPr/>
+          <a:p/>
+        </p:txBody>
       </p:sp>
       <p:sp>
         <p:nvSpPr>
@@ -5283,6 +5347,10 @@
           </a:solidFill>
           <a:ln/>
         </p:spPr>
+        <p:txBody>
+          <a:bodyPr/>
+          <a:p/>
+        </p:txBody>
       </p:sp>
       <p:pic>
         <p:nvPicPr>
@@ -5422,6 +5490,10 @@
             </a:outerShdw>
           </a:effectLst>
         </p:spPr>
+        <p:txBody>
+          <a:bodyPr/>
+          <a:p/>
+        </p:txBody>
       </p:sp>
       <p:sp>
         <p:nvSpPr>
@@ -5442,6 +5514,10 @@
           </a:solidFill>
           <a:ln/>
         </p:spPr>
+        <p:txBody>
+          <a:bodyPr/>
+          <a:p/>
+        </p:txBody>
       </p:sp>
       <p:pic>
         <p:nvPicPr>
@@ -5581,6 +5657,10 @@
             </a:outerShdw>
           </a:effectLst>
         </p:spPr>
+        <p:txBody>
+          <a:bodyPr/>
+          <a:p/>
+        </p:txBody>
       </p:sp>
       <p:sp>
         <p:nvSpPr>
@@ -5601,6 +5681,10 @@
           </a:solidFill>
           <a:ln/>
         </p:spPr>
+        <p:txBody>
+          <a:bodyPr/>
+          <a:p/>
+        </p:txBody>
       </p:sp>
       <p:pic>
         <p:nvPicPr>
@@ -6467,6 +6551,10 @@
             </a:outerShdw>
           </a:effectLst>
         </p:spPr>
+        <p:txBody>
+          <a:bodyPr/>
+          <a:p/>
+        </p:txBody>
       </p:sp>
       <p:sp>
         <p:nvSpPr>
@@ -6487,6 +6575,10 @@
           </a:solidFill>
           <a:ln/>
         </p:spPr>
+        <p:txBody>
+          <a:bodyPr/>
+          <a:p/>
+        </p:txBody>
       </p:sp>
       <p:pic>
         <p:nvPicPr>
@@ -6626,6 +6718,10 @@
             </a:outerShdw>
           </a:effectLst>
         </p:spPr>
+        <p:txBody>
+          <a:bodyPr/>
+          <a:p/>
+        </p:txBody>
       </p:sp>
       <p:sp>
         <p:nvSpPr>
@@ -6646,6 +6742,10 @@
           </a:solidFill>
           <a:ln/>
         </p:spPr>
+        <p:txBody>
+          <a:bodyPr/>
+          <a:p/>
+        </p:txBody>
       </p:sp>
       <p:pic>
         <p:nvPicPr>
@@ -6922,6 +7022,10 @@
           </a:solidFill>
           <a:ln/>
         </p:spPr>
+        <p:txBody>
+          <a:bodyPr/>
+          <a:p/>
+        </p:txBody>
       </p:sp>
       <p:pic>
         <p:nvPicPr>
@@ -7241,6 +7345,10 @@
             </a:outerShdw>
           </a:effectLst>
         </p:spPr>
+        <p:txBody>
+          <a:bodyPr/>
+          <a:p/>
+        </p:txBody>
       </p:sp>
       <p:sp>
         <p:nvSpPr>
@@ -7261,6 +7369,10 @@
           </a:solidFill>
           <a:ln/>
         </p:spPr>
+        <p:txBody>
+          <a:bodyPr/>
+          <a:p/>
+        </p:txBody>
       </p:sp>
       <p:pic>
         <p:nvPicPr>
@@ -7400,6 +7512,10 @@
             </a:outerShdw>
           </a:effectLst>
         </p:spPr>
+        <p:txBody>
+          <a:bodyPr/>
+          <a:p/>
+        </p:txBody>
       </p:sp>
       <p:sp>
         <p:nvSpPr>
@@ -7420,6 +7536,10 @@
           </a:solidFill>
           <a:ln/>
         </p:spPr>
+        <p:txBody>
+          <a:bodyPr/>
+          <a:p/>
+        </p:txBody>
       </p:sp>
       <p:pic>
         <p:nvPicPr>
@@ -9147,6 +9267,10 @@
           </a:solidFill>
           <a:ln/>
         </p:spPr>
+        <p:txBody>
+          <a:bodyPr/>
+          <a:p/>
+        </p:txBody>
       </p:sp>
       <p:pic>
         <p:nvPicPr>
